--- a/Historias_Usuario_Clase_Completa.pptx
+++ b/Historias_Usuario_Clase_Completa.pptx
@@ -311,7 +311,7 @@
           <a:p>
             <a:fld id="{5BCAD085-E8A6-8845-BD4E-CB4CCA059FC4}" type="datetimeFigureOut">
               <a:rPr lang="en-US" smtClean="0"/>
-              <a:t>6/17/2026</a:t>
+              <a:t>7/14/2026</a:t>
             </a:fld>
             <a:endParaRPr lang="en-US"/>
           </a:p>
@@ -479,7 +479,7 @@
           <a:p>
             <a:fld id="{5BCAD085-E8A6-8845-BD4E-CB4CCA059FC4}" type="datetimeFigureOut">
               <a:rPr lang="en-US" smtClean="0"/>
-              <a:t>6/17/2026</a:t>
+              <a:t>7/14/2026</a:t>
             </a:fld>
             <a:endParaRPr lang="en-US"/>
           </a:p>
@@ -657,7 +657,7 @@
           <a:p>
             <a:fld id="{5BCAD085-E8A6-8845-BD4E-CB4CCA059FC4}" type="datetimeFigureOut">
               <a:rPr lang="en-US" smtClean="0"/>
-              <a:t>6/17/2026</a:t>
+              <a:t>7/14/2026</a:t>
             </a:fld>
             <a:endParaRPr lang="en-US"/>
           </a:p>
@@ -825,7 +825,7 @@
           <a:p>
             <a:fld id="{5BCAD085-E8A6-8845-BD4E-CB4CCA059FC4}" type="datetimeFigureOut">
               <a:rPr lang="en-US" smtClean="0"/>
-              <a:t>6/17/2026</a:t>
+              <a:t>7/14/2026</a:t>
             </a:fld>
             <a:endParaRPr lang="en-US"/>
           </a:p>
@@ -1070,7 +1070,7 @@
           <a:p>
             <a:fld id="{5BCAD085-E8A6-8845-BD4E-CB4CCA059FC4}" type="datetimeFigureOut">
               <a:rPr lang="en-US" smtClean="0"/>
-              <a:t>6/17/2026</a:t>
+              <a:t>7/14/2026</a:t>
             </a:fld>
             <a:endParaRPr lang="en-US"/>
           </a:p>
@@ -1355,7 +1355,7 @@
           <a:p>
             <a:fld id="{5BCAD085-E8A6-8845-BD4E-CB4CCA059FC4}" type="datetimeFigureOut">
               <a:rPr lang="en-US" smtClean="0"/>
-              <a:t>6/17/2026</a:t>
+              <a:t>7/14/2026</a:t>
             </a:fld>
             <a:endParaRPr lang="en-US"/>
           </a:p>
@@ -1774,7 +1774,7 @@
           <a:p>
             <a:fld id="{5BCAD085-E8A6-8845-BD4E-CB4CCA059FC4}" type="datetimeFigureOut">
               <a:rPr lang="en-US" smtClean="0"/>
-              <a:t>6/17/2026</a:t>
+              <a:t>7/14/2026</a:t>
             </a:fld>
             <a:endParaRPr lang="en-US"/>
           </a:p>
@@ -1891,7 +1891,7 @@
           <a:p>
             <a:fld id="{5BCAD085-E8A6-8845-BD4E-CB4CCA059FC4}" type="datetimeFigureOut">
               <a:rPr lang="en-US" smtClean="0"/>
-              <a:t>6/17/2026</a:t>
+              <a:t>7/14/2026</a:t>
             </a:fld>
             <a:endParaRPr lang="en-US"/>
           </a:p>
@@ -1986,7 +1986,7 @@
           <a:p>
             <a:fld id="{5BCAD085-E8A6-8845-BD4E-CB4CCA059FC4}" type="datetimeFigureOut">
               <a:rPr lang="en-US" smtClean="0"/>
-              <a:t>6/17/2026</a:t>
+              <a:t>7/14/2026</a:t>
             </a:fld>
             <a:endParaRPr lang="en-US"/>
           </a:p>
@@ -2261,7 +2261,7 @@
           <a:p>
             <a:fld id="{5BCAD085-E8A6-8845-BD4E-CB4CCA059FC4}" type="datetimeFigureOut">
               <a:rPr lang="en-US" smtClean="0"/>
-              <a:t>6/17/2026</a:t>
+              <a:t>7/14/2026</a:t>
             </a:fld>
             <a:endParaRPr lang="en-US"/>
           </a:p>
@@ -2513,7 +2513,7 @@
           <a:p>
             <a:fld id="{5BCAD085-E8A6-8845-BD4E-CB4CCA059FC4}" type="datetimeFigureOut">
               <a:rPr lang="en-US" smtClean="0"/>
-              <a:t>6/17/2026</a:t>
+              <a:t>7/14/2026</a:t>
             </a:fld>
             <a:endParaRPr lang="en-US"/>
           </a:p>
@@ -2724,7 +2724,7 @@
           <a:p>
             <a:fld id="{5BCAD085-E8A6-8845-BD4E-CB4CCA059FC4}" type="datetimeFigureOut">
               <a:rPr lang="en-US" smtClean="0"/>
-              <a:t>6/17/2026</a:t>
+              <a:t>7/14/2026</a:t>
             </a:fld>
             <a:endParaRPr lang="en-US"/>
           </a:p>
@@ -3139,8 +3139,8 @@
               <a:buNone/>
             </a:pPr>
             <a:r>
-              <a:rPr lang="es-MX" dirty="0"/>
-              <a:t>INTEGRADORA 1</a:t>
+              <a:rPr lang="es-MX"/>
+              <a:t>dfbadfbadfbadfbdfb</a:t>
             </a:r>
             <a:endParaRPr dirty="0"/>
           </a:p>
